--- a/slides/APL_Bootcamp-part-2.pptx
+++ b/slides/APL_Bootcamp-part-2.pptx
@@ -315,7 +315,7 @@
               <a:rPr lang="en-GB" smtClean="0">
                 <a:latin typeface="Sarabun" panose="00000500000000000000" pitchFamily="2" charset="-34"/>
               </a:rPr>
-              <a:t>10/08/2025</a:t>
+              <a:t>20/08/2025</a:t>
             </a:fld>
             <a:endParaRPr lang="en-GB" dirty="0">
               <a:latin typeface="Sarabun" panose="00000500000000000000" pitchFamily="2" charset="-34"/>
@@ -493,7 +493,7 @@
             <a:fld id="{CDEAEF8A-5BB8-41C8-B8C2-160617C17EF4}" type="datetimeFigureOut">
               <a:rPr lang="en-GB" smtClean="0"/>
               <a:pPr/>
-              <a:t>10/08/2025</a:t>
+              <a:t>20/08/2025</a:t>
             </a:fld>
             <a:endParaRPr lang="en-GB" dirty="0"/>
           </a:p>
@@ -5860,7 +5860,7 @@
         <p:spPr/>
         <p:txBody>
           <a:bodyPr>
-            <a:normAutofit fontScale="92500" lnSpcReduction="20000"/>
+            <a:normAutofit fontScale="92500" lnSpcReduction="10000"/>
           </a:bodyPr>
           <a:lstStyle/>
           <a:p>
@@ -5874,12 +5874,9 @@
           </a:p>
           <a:p>
             <a:pPr marL="0" indent="0">
-              <a:buNone/>
-            </a:pPr>
-            <a:endParaRPr lang="en-GB" dirty="0"/>
-          </a:p>
-          <a:p>
-            <a:pPr marL="0" indent="0">
+              <a:spcAft>
+                <a:spcPts val="0"/>
+              </a:spcAft>
               <a:buNone/>
             </a:pPr>
             <a:r>
@@ -5912,7 +5909,7 @@
                 </a:solidFill>
                 <a:latin typeface="APL385 Unicode" panose="020B0709000202000203" pitchFamily="49" charset="0"/>
               </a:rPr>
-              <a:t>      C←'APL*' </a:t>
+              <a:t>      B←'APL*' </a:t>
             </a:r>
             <a:br>
               <a:rPr lang="en-GB" dirty="0">
@@ -5929,103 +5926,110 @@
                 </a:solidFill>
                 <a:latin typeface="APL385 Unicode" panose="020B0709000202000203" pitchFamily="49" charset="0"/>
               </a:rPr>
-              <a:t>      ⍴⎕←A</a:t>
-            </a:r>
-            <a:r>
-              <a:rPr lang="en-GB" b="1" dirty="0">
-                <a:solidFill>
-                  <a:srgbClr val="FF6600"/>
-                </a:solidFill>
-                <a:latin typeface="APL385 Unicode" panose="020B0709000202000203" pitchFamily="49" charset="0"/>
-              </a:rPr>
-              <a:t>⍪</a:t>
-            </a:r>
-            <a:r>
-              <a:rPr lang="en-GB" dirty="0">
+              <a:t>     </a:t>
+            </a:r>
+            <a:r>
+              <a:rPr lang="pt-BR" dirty="0">
                 <a:solidFill>
                   <a:srgbClr val="00B050"/>
                 </a:solidFill>
                 <a:latin typeface="APL385 Unicode" panose="020B0709000202000203" pitchFamily="49" charset="0"/>
               </a:rPr>
-              <a:t>B </a:t>
-            </a:r>
-            <a:br>
-              <a:rPr lang="en-GB" dirty="0">
+              <a:t> ⍴A⍪B</a:t>
+            </a:r>
+          </a:p>
+          <a:p>
+            <a:pPr marL="0" indent="0">
+              <a:spcAft>
+                <a:spcPts val="0"/>
+              </a:spcAft>
+              <a:buNone/>
+            </a:pPr>
+            <a:r>
+              <a:rPr lang="pt-BR" dirty="0">
                 <a:solidFill>
                   <a:srgbClr val="00B050"/>
                 </a:solidFill>
                 <a:latin typeface="APL385 Unicode" panose="020B0709000202000203" pitchFamily="49" charset="0"/>
               </a:rPr>
-            </a:br>
-            <a:r>
-              <a:rPr lang="en-GB" dirty="0">
-                <a:solidFill>
-                  <a:schemeClr val="accent3">
-                    <a:lumMod val="50000"/>
-                  </a:schemeClr>
+              <a:t>3 4</a:t>
+            </a:r>
+          </a:p>
+          <a:p>
+            <a:pPr marL="0" indent="0">
+              <a:spcAft>
+                <a:spcPts val="0"/>
+              </a:spcAft>
+              <a:buNone/>
+            </a:pPr>
+            <a:r>
+              <a:rPr lang="pt-BR" dirty="0">
+                <a:solidFill>
+                  <a:srgbClr val="00B050"/>
+                </a:solidFill>
+                <a:latin typeface="APL385 Unicode" panose="020B0709000202000203" pitchFamily="49" charset="0"/>
+              </a:rPr>
+              <a:t>      A⍪B</a:t>
+            </a:r>
+          </a:p>
+          <a:p>
+            <a:pPr marL="0" indent="0">
+              <a:spcAft>
+                <a:spcPts val="0"/>
+              </a:spcAft>
+              <a:buNone/>
+            </a:pPr>
+            <a:r>
+              <a:rPr lang="pt-BR" dirty="0">
+                <a:solidFill>
+                  <a:srgbClr val="00B050"/>
                 </a:solidFill>
                 <a:latin typeface="APL385 Unicode" panose="020B0709000202000203" pitchFamily="49" charset="0"/>
               </a:rPr>
               <a:t>1 2 3 4</a:t>
             </a:r>
-            <a:br>
-              <a:rPr lang="en-GB" dirty="0">
-                <a:solidFill>
-                  <a:schemeClr val="accent3">
-                    <a:lumMod val="50000"/>
-                  </a:schemeClr>
-                </a:solidFill>
-                <a:latin typeface="APL385 Unicode" panose="020B0709000202000203" pitchFamily="49" charset="0"/>
-              </a:rPr>
-            </a:br>
-            <a:r>
-              <a:rPr lang="en-GB" dirty="0">
-                <a:solidFill>
-                  <a:schemeClr val="accent3">
-                    <a:lumMod val="50000"/>
-                  </a:schemeClr>
+          </a:p>
+          <a:p>
+            <a:pPr marL="0" indent="0">
+              <a:spcAft>
+                <a:spcPts val="0"/>
+              </a:spcAft>
+              <a:buNone/>
+            </a:pPr>
+            <a:r>
+              <a:rPr lang="pt-BR" dirty="0">
+                <a:solidFill>
+                  <a:srgbClr val="00B050"/>
                 </a:solidFill>
                 <a:latin typeface="APL385 Unicode" panose="020B0709000202000203" pitchFamily="49" charset="0"/>
               </a:rPr>
               <a:t>5 6 7 8</a:t>
             </a:r>
-            <a:br>
-              <a:rPr lang="en-GB" dirty="0">
-                <a:solidFill>
-                  <a:schemeClr val="accent3">
-                    <a:lumMod val="50000"/>
-                  </a:schemeClr>
-                </a:solidFill>
-                <a:latin typeface="APL385 Unicode" panose="020B0709000202000203" pitchFamily="49" charset="0"/>
-              </a:rPr>
-            </a:br>
-            <a:r>
-              <a:rPr lang="en-GB" dirty="0">
-                <a:solidFill>
-                  <a:schemeClr val="accent3">
-                    <a:lumMod val="50000"/>
-                  </a:schemeClr>
+          </a:p>
+          <a:p>
+            <a:pPr marL="0" indent="0">
+              <a:spcAft>
+                <a:spcPts val="0"/>
+              </a:spcAft>
+              <a:buNone/>
+            </a:pPr>
+            <a:r>
+              <a:rPr lang="pt-BR" dirty="0">
+                <a:solidFill>
+                  <a:srgbClr val="00B050"/>
                 </a:solidFill>
                 <a:latin typeface="APL385 Unicode" panose="020B0709000202000203" pitchFamily="49" charset="0"/>
               </a:rPr>
               <a:t>A P L *</a:t>
             </a:r>
-          </a:p>
-          <a:p>
-            <a:pPr marL="0" indent="0">
-              <a:buNone/>
-            </a:pPr>
-            <a:r>
-              <a:rPr lang="en-GB" dirty="0">
-                <a:solidFill>
-                  <a:schemeClr val="accent3">
-                    <a:lumMod val="50000"/>
-                  </a:schemeClr>
-                </a:solidFill>
-                <a:latin typeface="APL385 Unicode" panose="020B0709000202000203" pitchFamily="49" charset="0"/>
-              </a:rPr>
-              <a:t>3 4</a:t>
-            </a:r>
+            <a:endParaRPr lang="en-GB" dirty="0">
+              <a:solidFill>
+                <a:schemeClr val="accent3">
+                  <a:lumMod val="50000"/>
+                </a:schemeClr>
+              </a:solidFill>
+              <a:latin typeface="APL385 Unicode" panose="020B0709000202000203" pitchFamily="49" charset="0"/>
+            </a:endParaRPr>
           </a:p>
         </p:txBody>
       </p:sp>
@@ -8581,30 +8585,50 @@
           <a:bodyPr/>
           <a:lstStyle/>
           <a:p>
+            <a:pPr>
+              <a:buFont typeface="+mj-lt"/>
+              <a:buAutoNum type="arabicPeriod"/>
+            </a:pPr>
             <a:r>
               <a:rPr lang="en-GB" dirty="0"/>
               <a:t>Create an addition table for the numbers 1 to 9</a:t>
             </a:r>
           </a:p>
           <a:p>
+            <a:pPr>
+              <a:buFont typeface="+mj-lt"/>
+              <a:buAutoNum type="arabicPeriod"/>
+            </a:pPr>
             <a:r>
               <a:rPr lang="en-GB" dirty="0"/>
               <a:t>Add 0 and 100 to the table in one expression</a:t>
             </a:r>
           </a:p>
           <a:p>
+            <a:pPr>
+              <a:buFont typeface="+mj-lt"/>
+              <a:buAutoNum type="arabicPeriod"/>
+            </a:pPr>
             <a:r>
               <a:rPr lang="en-GB" dirty="0"/>
               <a:t>How many dimensions does the result have (what is its shape)?</a:t>
             </a:r>
           </a:p>
           <a:p>
+            <a:pPr>
+              <a:buFont typeface="+mj-lt"/>
+              <a:buAutoNum type="arabicPeriod"/>
+            </a:pPr>
             <a:r>
               <a:rPr lang="en-GB" dirty="0"/>
               <a:t>Calculate 1000000 x 1000000 x 1000000</a:t>
             </a:r>
           </a:p>
           <a:p>
+            <a:pPr>
+              <a:buFont typeface="+mj-lt"/>
+              <a:buAutoNum type="arabicPeriod"/>
+            </a:pPr>
             <a:r>
               <a:rPr lang="en-GB" dirty="0"/>
               <a:t>Write Avogadro’s number (6.02x10</a:t>

--- a/slides/APL_Bootcamp-part-2.pptx
+++ b/slides/APL_Bootcamp-part-2.pptx
@@ -315,7 +315,7 @@
               <a:rPr lang="en-GB" smtClean="0">
                 <a:latin typeface="Sarabun" panose="00000500000000000000" pitchFamily="2" charset="-34"/>
               </a:rPr>
-              <a:t>20/08/2025</a:t>
+              <a:t>22/08/2025</a:t>
             </a:fld>
             <a:endParaRPr lang="en-GB" dirty="0">
               <a:latin typeface="Sarabun" panose="00000500000000000000" pitchFamily="2" charset="-34"/>
@@ -493,7 +493,7 @@
             <a:fld id="{CDEAEF8A-5BB8-41C8-B8C2-160617C17EF4}" type="datetimeFigureOut">
               <a:rPr lang="en-GB" smtClean="0"/>
               <a:pPr/>
-              <a:t>20/08/2025</a:t>
+              <a:t>22/08/2025</a:t>
             </a:fld>
             <a:endParaRPr lang="en-GB" dirty="0"/>
           </a:p>
@@ -764,6 +764,94 @@
     </a:lvl9pPr>
   </p:notesStyle>
 </p:notesMaster>
+</file>
+
+<file path=ppt/notesSlides/notesSlide1.xml><?xml version="1.0" encoding="utf-8"?>
+<p:notes xmlns:a="http://schemas.openxmlformats.org/drawingml/2006/main" xmlns:r="http://schemas.openxmlformats.org/officeDocument/2006/relationships" xmlns:p="http://schemas.openxmlformats.org/presentationml/2006/main">
+  <p:cSld>
+    <p:spTree>
+      <p:nvGrpSpPr>
+        <p:cNvPr id="1" name=""/>
+        <p:cNvGrpSpPr/>
+        <p:nvPr/>
+      </p:nvGrpSpPr>
+      <p:grpSpPr>
+        <a:xfrm>
+          <a:off x="0" y="0"/>
+          <a:ext cx="0" cy="0"/>
+          <a:chOff x="0" y="0"/>
+          <a:chExt cx="0" cy="0"/>
+        </a:xfrm>
+      </p:grpSpPr>
+      <p:sp>
+        <p:nvSpPr>
+          <p:cNvPr id="2" name="Slide Image Placeholder 1"/>
+          <p:cNvSpPr>
+            <a:spLocks noGrp="1" noRot="1" noChangeAspect="1"/>
+          </p:cNvSpPr>
+          <p:nvPr>
+            <p:ph type="sldImg"/>
+          </p:nvPr>
+        </p:nvSpPr>
+        <p:spPr/>
+      </p:sp>
+      <p:sp>
+        <p:nvSpPr>
+          <p:cNvPr id="3" name="Notes Placeholder 2"/>
+          <p:cNvSpPr>
+            <a:spLocks noGrp="1"/>
+          </p:cNvSpPr>
+          <p:nvPr>
+            <p:ph type="body" idx="1"/>
+          </p:nvPr>
+        </p:nvSpPr>
+        <p:spPr/>
+        <p:txBody>
+          <a:bodyPr/>
+          <a:lstStyle/>
+          <a:p>
+            <a:r>
+              <a:rPr lang="en-GB" dirty="0"/>
+              <a:t>Note how B is a vector and A is a matrix!</a:t>
+            </a:r>
+          </a:p>
+        </p:txBody>
+      </p:sp>
+      <p:sp>
+        <p:nvSpPr>
+          <p:cNvPr id="4" name="Slide Number Placeholder 3"/>
+          <p:cNvSpPr>
+            <a:spLocks noGrp="1"/>
+          </p:cNvSpPr>
+          <p:nvPr>
+            <p:ph type="sldNum" sz="quarter" idx="5"/>
+          </p:nvPr>
+        </p:nvSpPr>
+        <p:spPr/>
+        <p:txBody>
+          <a:bodyPr/>
+          <a:lstStyle/>
+          <a:p>
+            <a:fld id="{4320660A-27FD-4528-AE7F-EC6080404EEB}" type="slidenum">
+              <a:rPr lang="en-GB" smtClean="0"/>
+              <a:pPr/>
+              <a:t>18</a:t>
+            </a:fld>
+            <a:endParaRPr lang="en-GB" dirty="0"/>
+          </a:p>
+        </p:txBody>
+      </p:sp>
+    </p:spTree>
+    <p:extLst>
+      <p:ext uri="{BB962C8B-B14F-4D97-AF65-F5344CB8AC3E}">
+        <p14:creationId xmlns:p14="http://schemas.microsoft.com/office/powerpoint/2010/main" val="2869800291"/>
+      </p:ext>
+    </p:extLst>
+  </p:cSld>
+  <p:clrMapOvr>
+    <a:masterClrMapping/>
+  </p:clrMapOvr>
+</p:notes>
 </file>
 
 <file path=ppt/slideLayouts/slideLayout1.xml><?xml version="1.0" encoding="utf-8"?>
@@ -6111,6 +6199,63 @@
           </a:p>
         </p:txBody>
       </p:sp>
+      <p:sp>
+        <p:nvSpPr>
+          <p:cNvPr id="5" name="Rectangle: Rounded Corners 4">
+            <a:extLst>
+              <a:ext uri="{FF2B5EF4-FFF2-40B4-BE49-F238E27FC236}">
+                <a16:creationId xmlns:a16="http://schemas.microsoft.com/office/drawing/2014/main" id="{DE86B597-9AEF-2955-CD70-61AE6123F5B6}"/>
+              </a:ext>
+            </a:extLst>
+          </p:cNvPr>
+          <p:cNvSpPr/>
+          <p:nvPr/>
+        </p:nvSpPr>
+        <p:spPr>
+          <a:xfrm>
+            <a:off x="5343729" y="2571750"/>
+            <a:ext cx="2146570" cy="901430"/>
+          </a:xfrm>
+          <a:prstGeom prst="roundRect">
+            <a:avLst/>
+          </a:prstGeom>
+          <a:solidFill>
+            <a:schemeClr val="tx1"/>
+          </a:solidFill>
+          <a:ln>
+            <a:solidFill>
+              <a:srgbClr val="FF6600"/>
+            </a:solidFill>
+          </a:ln>
+        </p:spPr>
+        <p:style>
+          <a:lnRef idx="2">
+            <a:schemeClr val="accent1">
+              <a:shade val="15000"/>
+            </a:schemeClr>
+          </a:lnRef>
+          <a:fillRef idx="1">
+            <a:schemeClr val="accent1"/>
+          </a:fillRef>
+          <a:effectRef idx="0">
+            <a:schemeClr val="accent1"/>
+          </a:effectRef>
+          <a:fontRef idx="minor">
+            <a:schemeClr val="lt1"/>
+          </a:fontRef>
+        </p:style>
+        <p:txBody>
+          <a:bodyPr rtlCol="0" anchor="ctr"/>
+          <a:lstStyle/>
+          <a:p>
+            <a:pPr algn="ctr"/>
+            <a:r>
+              <a:rPr lang="en-GB" dirty="0"/>
+              <a:t>Note: B is a vector and A is a matrix!</a:t>
+            </a:r>
+          </a:p>
+        </p:txBody>
+      </p:sp>
     </p:spTree>
     <p:extLst>
       <p:ext uri="{BB962C8B-B14F-4D97-AF65-F5344CB8AC3E}">
@@ -6121,6 +6266,84 @@
   <p:clrMapOvr>
     <a:masterClrMapping/>
   </p:clrMapOvr>
+  <p:timing>
+    <p:tnLst>
+      <p:par>
+        <p:cTn id="1" dur="indefinite" restart="never" nodeType="tmRoot">
+          <p:childTnLst>
+            <p:seq concurrent="1" nextAc="seek">
+              <p:cTn id="2" dur="indefinite" nodeType="mainSeq">
+                <p:childTnLst>
+                  <p:par>
+                    <p:cTn id="3" fill="hold">
+                      <p:stCondLst>
+                        <p:cond delay="indefinite"/>
+                      </p:stCondLst>
+                      <p:childTnLst>
+                        <p:par>
+                          <p:cTn id="4" fill="hold">
+                            <p:stCondLst>
+                              <p:cond delay="0"/>
+                            </p:stCondLst>
+                            <p:childTnLst>
+                              <p:par>
+                                <p:cTn id="5" presetID="1" presetClass="entr" presetSubtype="0" fill="hold" grpId="0" nodeType="clickEffect">
+                                  <p:stCondLst>
+                                    <p:cond delay="0"/>
+                                  </p:stCondLst>
+                                  <p:childTnLst>
+                                    <p:set>
+                                      <p:cBhvr>
+                                        <p:cTn id="6" dur="1" fill="hold">
+                                          <p:stCondLst>
+                                            <p:cond delay="0"/>
+                                          </p:stCondLst>
+                                        </p:cTn>
+                                        <p:tgtEl>
+                                          <p:spTgt spid="5"/>
+                                        </p:tgtEl>
+                                        <p:attrNameLst>
+                                          <p:attrName>style.visibility</p:attrName>
+                                        </p:attrNameLst>
+                                      </p:cBhvr>
+                                      <p:to>
+                                        <p:strVal val="visible"/>
+                                      </p:to>
+                                    </p:set>
+                                  </p:childTnLst>
+                                </p:cTn>
+                              </p:par>
+                            </p:childTnLst>
+                          </p:cTn>
+                        </p:par>
+                      </p:childTnLst>
+                    </p:cTn>
+                  </p:par>
+                </p:childTnLst>
+              </p:cTn>
+              <p:prevCondLst>
+                <p:cond evt="onPrev" delay="0">
+                  <p:tgtEl>
+                    <p:sldTgt/>
+                  </p:tgtEl>
+                </p:cond>
+              </p:prevCondLst>
+              <p:nextCondLst>
+                <p:cond evt="onNext" delay="0">
+                  <p:tgtEl>
+                    <p:sldTgt/>
+                  </p:tgtEl>
+                </p:cond>
+              </p:nextCondLst>
+            </p:seq>
+          </p:childTnLst>
+        </p:cTn>
+      </p:par>
+    </p:tnLst>
+    <p:bldLst>
+      <p:bldP spid="5" grpId="0" animBg="1"/>
+    </p:bldLst>
+  </p:timing>
 </p:sld>
 </file>
 
